--- a/assets/powerpoints/module-activite/B3-le-plus-le-moins.pptx
+++ b/assets/powerpoints/module-activite/B3-le-plus-le-moins.pptx
@@ -8867,7 +8867,61 @@
                 </a:solidFill>
                 <a:latin typeface="Verdana"/>
               </a:rPr>
-              <a:t>le cours &lt;b&gt;le plus&lt;/b&gt; court · l'activité &lt;b&gt;la plus&lt;/b&gt; chère · les places &lt;b&gt;les moins&lt;/b&gt; chères. Si vous savez mettre l'article, vous savez faire l'accord.</a:t>
+              <a:t>le cours </a:t>
+            </a:r>
+            <a:r>
+              <a:rPr sz="2000" b="1" i="0">
+                <a:solidFill>
+                  <a:srgbClr val="4B4F52"/>
+                </a:solidFill>
+                <a:latin typeface="Verdana"/>
+              </a:rPr>
+              <a:t>le plus</a:t>
+            </a:r>
+            <a:r>
+              <a:rPr sz="2000" b="0" i="0">
+                <a:solidFill>
+                  <a:srgbClr val="4B4F52"/>
+                </a:solidFill>
+                <a:latin typeface="Verdana"/>
+              </a:rPr>
+              <a:t> court · l'activité </a:t>
+            </a:r>
+            <a:r>
+              <a:rPr sz="2000" b="1" i="0">
+                <a:solidFill>
+                  <a:srgbClr val="4B4F52"/>
+                </a:solidFill>
+                <a:latin typeface="Verdana"/>
+              </a:rPr>
+              <a:t>la plus</a:t>
+            </a:r>
+            <a:r>
+              <a:rPr sz="2000" b="0" i="0">
+                <a:solidFill>
+                  <a:srgbClr val="4B4F52"/>
+                </a:solidFill>
+                <a:latin typeface="Verdana"/>
+              </a:rPr>
+              <a:t> chère · les places </a:t>
+            </a:r>
+            <a:r>
+              <a:rPr sz="2000" b="1" i="0">
+                <a:solidFill>
+                  <a:srgbClr val="4B4F52"/>
+                </a:solidFill>
+                <a:latin typeface="Verdana"/>
+              </a:rPr>
+              <a:t>les moins</a:t>
+            </a:r>
+            <a:r>
+              <a:rPr sz="2000" b="0" i="0">
+                <a:solidFill>
+                  <a:srgbClr val="4B4F52"/>
+                </a:solidFill>
+                <a:latin typeface="Verdana"/>
+              </a:rPr>
+              <a:t> chères. Si vous savez mettre l'article, vous savez faire l'accord.</a:t>
             </a:r>
           </a:p>
         </p:txBody>
@@ -9416,7 +9470,79 @@
                 </a:solidFill>
                 <a:latin typeface="Verdana"/>
               </a:rPr>
-              <a:t>Un seul adjectif fait exception, et c'est l'un des plus employés : &lt;b&gt;bon&lt;/b&gt; devient &lt;b&gt;meilleur&lt;/b&gt;. L'adverbe &lt;b&gt;bien&lt;/b&gt; devient &lt;b&gt;mieux&lt;/b&gt;. « Plus bon » n'existe pas, dans aucune situation.</a:t>
+              <a:t>Un seul adjectif fait exception, et c'est l'un des plus employés : </a:t>
+            </a:r>
+            <a:r>
+              <a:rPr sz="2000" b="1" i="0">
+                <a:solidFill>
+                  <a:srgbClr val="4B4F52"/>
+                </a:solidFill>
+                <a:latin typeface="Verdana"/>
+              </a:rPr>
+              <a:t>bon</a:t>
+            </a:r>
+            <a:r>
+              <a:rPr sz="2000" b="0" i="0">
+                <a:solidFill>
+                  <a:srgbClr val="4B4F52"/>
+                </a:solidFill>
+                <a:latin typeface="Verdana"/>
+              </a:rPr>
+              <a:t> devient </a:t>
+            </a:r>
+            <a:r>
+              <a:rPr sz="2000" b="1" i="0">
+                <a:solidFill>
+                  <a:srgbClr val="4B4F52"/>
+                </a:solidFill>
+                <a:latin typeface="Verdana"/>
+              </a:rPr>
+              <a:t>meilleur</a:t>
+            </a:r>
+            <a:r>
+              <a:rPr sz="2000" b="0" i="0">
+                <a:solidFill>
+                  <a:srgbClr val="4B4F52"/>
+                </a:solidFill>
+                <a:latin typeface="Verdana"/>
+              </a:rPr>
+              <a:t>. L'adverbe </a:t>
+            </a:r>
+            <a:r>
+              <a:rPr sz="2000" b="1" i="0">
+                <a:solidFill>
+                  <a:srgbClr val="4B4F52"/>
+                </a:solidFill>
+                <a:latin typeface="Verdana"/>
+              </a:rPr>
+              <a:t>bien</a:t>
+            </a:r>
+            <a:r>
+              <a:rPr sz="2000" b="0" i="0">
+                <a:solidFill>
+                  <a:srgbClr val="4B4F52"/>
+                </a:solidFill>
+                <a:latin typeface="Verdana"/>
+              </a:rPr>
+              <a:t> devient </a:t>
+            </a:r>
+            <a:r>
+              <a:rPr sz="2000" b="1" i="0">
+                <a:solidFill>
+                  <a:srgbClr val="4B4F52"/>
+                </a:solidFill>
+                <a:latin typeface="Verdana"/>
+              </a:rPr>
+              <a:t>mieux</a:t>
+            </a:r>
+            <a:r>
+              <a:rPr sz="2000" b="0" i="0">
+                <a:solidFill>
+                  <a:srgbClr val="4B4F52"/>
+                </a:solidFill>
+                <a:latin typeface="Verdana"/>
+              </a:rPr>
+              <a:t>. « Plus bon » n'existe pas, dans aucune situation.</a:t>
             </a:r>
           </a:p>
         </p:txBody>
